--- a/classes/parte-7-red-team-y-operaciones-ofensivas/176-opsec-ofensiva/clase-176-presentacion.pptx
+++ b/classes/parte-7-red-team-y-operaciones-ofensivas/176-opsec-ofensiva/clase-176-presentacion.pptx
@@ -17,6 +17,9 @@
     <p:sldId id="265" r:id="rId16"/>
     <p:sldId id="266" r:id="rId17"/>
     <p:sldId id="267" r:id="rId18"/>
+    <p:sldId id="268" r:id="rId19"/>
+    <p:sldId id="269" r:id="rId20"/>
+    <p:sldId id="270" r:id="rId21"/>
   </p:sldIdLst>
   <p:sldSz cx="9144000" cy="6858000" type="screen4x3"/>
   <p:notesSz cx="6858000" cy="9144000"/>
@@ -3198,7 +3201,7 @@
                   <a:srgbClr val="0B3D2E"/>
                 </a:solidFill>
               </a:rPr>
-              <a:t>⚠️ Errores comunes</a:t>
+              <a:t>✍️ Ejercicios</a:t>
             </a:r>
           </a:p>
         </p:txBody>
@@ -3236,67 +3239,82 @@
                   <a:srgbClr val="22282E"/>
                 </a:solidFill>
               </a:rPr>
-              <a:t>•  Detectado por beaconing regular — Jitter=0; añade variación al check-in</a:t>
-            </a:r>
-          </a:p>
-          <a:p>
-            <a:pPr>
-              <a:spcAft>
-                <a:spcPts val="600"/>
-              </a:spcAft>
-            </a:pPr>
-            <a:r>
-              <a:rPr sz="1500">
-                <a:solidFill>
-                  <a:srgbClr val="22282E"/>
-                </a:solidFill>
-              </a:rPr>
-              <a:t>•  El Blue Team te atribuye rápido — Infraestructura reutilizada/identificable; sepárala e higienízala</a:t>
-            </a:r>
-          </a:p>
-          <a:p>
-            <a:pPr>
-              <a:spcAft>
-                <a:spcPts val="600"/>
-              </a:spcAft>
-            </a:pPr>
-            <a:r>
-              <a:rPr sz="1500">
-                <a:solidFill>
-                  <a:srgbClr val="22282E"/>
-                </a:solidFill>
-              </a:rPr>
-              <a:t>•  No puedes hacer deconfliction — Sin cuaderno; registra cada acción con timestamp</a:t>
-            </a:r>
-          </a:p>
-          <a:p>
-            <a:pPr>
-              <a:spcAft>
-                <a:spcPts val="600"/>
-              </a:spcAft>
-            </a:pPr>
-            <a:r>
-              <a:rPr sz="1500">
-                <a:solidFill>
-                  <a:srgbClr val="22282E"/>
-                </a:solidFill>
-              </a:rPr>
-              <a:t>•  Acción innecesariamente ruidosa — No evaluaste alternativas; usa la matriz antes de actuar</a:t>
-            </a:r>
-          </a:p>
-          <a:p>
-            <a:pPr>
-              <a:spcAft>
-                <a:spcPts val="600"/>
-              </a:spcAft>
-            </a:pPr>
-            <a:r>
-              <a:rPr sz="1500">
-                <a:solidFill>
-                  <a:srgbClr val="22282E"/>
-                </a:solidFill>
-              </a:rPr>
-              <a:t>•  Persistes tras ser quemado — No rotaste; ten un plan de reacción listo</a:t>
+              <a:t>•  Define OPSEC con tus palabras y da un ejemplo de mala OPSEC.</a:t>
+            </a:r>
+          </a:p>
+          <a:p>
+            <a:pPr>
+              <a:spcAft>
+                <a:spcPts val="600"/>
+              </a:spcAft>
+            </a:pPr>
+            <a:r>
+              <a:rPr sz="1500">
+                <a:solidFill>
+                  <a:srgbClr val="22282E"/>
+                </a:solidFill>
+              </a:rPr>
+              <a:t>•  Completa una matriz "acción → telemetría → alternativa" con 8 filas.</a:t>
+            </a:r>
+          </a:p>
+          <a:p>
+            <a:pPr>
+              <a:spcAft>
+                <a:spcPts val="600"/>
+              </a:spcAft>
+            </a:pPr>
+            <a:r>
+              <a:rPr sz="1500">
+                <a:solidFill>
+                  <a:srgbClr val="22282E"/>
+                </a:solidFill>
+              </a:rPr>
+              <a:t>•  Explica cómo el jitter dificulta la detección de beaconing.</a:t>
+            </a:r>
+          </a:p>
+          <a:p>
+            <a:pPr>
+              <a:spcAft>
+                <a:spcPts val="600"/>
+              </a:spcAft>
+            </a:pPr>
+            <a:r>
+              <a:rPr sz="1500">
+                <a:solidFill>
+                  <a:srgbClr val="22282E"/>
+                </a:solidFill>
+              </a:rPr>
+              <a:t>•  Diseña un esquema de infraestructura que minimice la atribución.</a:t>
+            </a:r>
+          </a:p>
+          <a:p>
+            <a:pPr>
+              <a:spcAft>
+                <a:spcPts val="600"/>
+              </a:spcAft>
+            </a:pPr>
+            <a:r>
+              <a:rPr sz="1500">
+                <a:solidFill>
+                  <a:srgbClr val="22282E"/>
+                </a:solidFill>
+              </a:rPr>
+              <a:t>•  Redacta el formato de una entrada de cuaderno de operación.</a:t>
+            </a:r>
+          </a:p>
+          <a:p>
+            <a:pPr>
+              <a:spcAft>
+                <a:spcPts val="600"/>
+              </a:spcAft>
+            </a:pPr>
+            <a:r>
+              <a:rPr sz="1500">
+                <a:solidFill>
+                  <a:srgbClr val="22282E"/>
+                </a:solidFill>
+              </a:rPr>
+              <a:t>•  Escribe un plan de 5 pasos para cuando te "queman".</a:t>
             </a:r>
           </a:p>
         </p:txBody>
@@ -3347,7 +3365,7 @@
                   <a:srgbClr val="0B3D2E"/>
                 </a:solidFill>
               </a:rPr>
-              <a:t>❓ Preguntas frecuentes</a:t>
+              <a:t>📝 Reto verificable</a:t>
             </a:r>
           </a:p>
         </p:txBody>
@@ -3385,82 +3403,22 @@
                   <a:srgbClr val="22282E"/>
                 </a:solidFill>
               </a:rPr>
-              <a:t>•  ❓ ¿OPSEC significa no ser detectado nunca?</a:t>
-            </a:r>
-          </a:p>
-          <a:p>
-            <a:pPr>
-              <a:spcAft>
-                <a:spcPts val="600"/>
-              </a:spcAft>
-            </a:pPr>
-            <a:r>
-              <a:rPr sz="1500">
-                <a:solidFill>
-                  <a:srgbClr val="22282E"/>
-                </a:solidFill>
-              </a:rPr>
-              <a:t>•  No. Significa controlar cuándo y cómo generas telemetría, para no quemar la operación antes de tiempo y poder medir la detección de forma útil.</a:t>
-            </a:r>
-          </a:p>
-          <a:p>
-            <a:pPr>
-              <a:spcAft>
-                <a:spcPts val="600"/>
-              </a:spcAft>
-            </a:pPr>
-            <a:r>
-              <a:rPr sz="1500">
-                <a:solidFill>
-                  <a:srgbClr val="22282E"/>
-                </a:solidFill>
-              </a:rPr>
-              <a:t>•  ❓ ¿La técnica más sigilosa es siempre la mejor?</a:t>
-            </a:r>
-          </a:p>
-          <a:p>
-            <a:pPr>
-              <a:spcAft>
-                <a:spcPts val="600"/>
-              </a:spcAft>
-            </a:pPr>
-            <a:r>
-              <a:rPr sz="1500">
-                <a:solidFill>
-                  <a:srgbClr val="22282E"/>
-                </a:solidFill>
-              </a:rPr>
-              <a:t>•  No; la mejor es la menos ruidosa que cumple el objetivo. Sigilo extremo que no logra la meta no sirve.</a:t>
-            </a:r>
-          </a:p>
-          <a:p>
-            <a:pPr>
-              <a:spcAft>
-                <a:spcPts val="600"/>
-              </a:spcAft>
-            </a:pPr>
-            <a:r>
-              <a:rPr sz="1500">
-                <a:solidFill>
-                  <a:srgbClr val="22282E"/>
-                </a:solidFill>
-              </a:rPr>
-              <a:t>•  ❓ ¿Por qué documentar tanto si busco sigilo?</a:t>
-            </a:r>
-          </a:p>
-          <a:p>
-            <a:pPr>
-              <a:spcAft>
-                <a:spcPts val="600"/>
-              </a:spcAft>
-            </a:pPr>
-            <a:r>
-              <a:rPr sz="1500">
-                <a:solidFill>
-                  <a:srgbClr val="22282E"/>
-                </a:solidFill>
-              </a:rPr>
-              <a:t>•  El cuaderno es interno y esencial para deconfliction, reproducibilidad y el informe final. Sigilo ante el objetivo, transparencia total ante el cliente.</a:t>
+              <a:t>•  Entrega una matriz OPSEC de al menos 8 acciones ofensivas con su telemetría y alternativa más sigilosa, respaldada por al menos una observación real en Sysmon de tu lab.</a:t>
+            </a:r>
+          </a:p>
+          <a:p>
+            <a:pPr>
+              <a:spcAft>
+                <a:spcPts val="600"/>
+              </a:spcAft>
+            </a:pPr>
+            <a:r>
+              <a:rPr sz="1500">
+                <a:solidFill>
+                  <a:srgbClr val="22282E"/>
+                </a:solidFill>
+              </a:rPr>
+              <a:t>•  Criterio de aceptación: cada fila tiene acción, telemetría concreta (evento/fuente de datos) y una alternativa justificada; al menos una fila se apoya en un evento que capturaste tú mismo en el…</a:t>
             </a:r>
           </a:p>
         </p:txBody>
@@ -3511,7 +3469,7 @@
                   <a:srgbClr val="0B3D2E"/>
                 </a:solidFill>
               </a:rPr>
-              <a:t>🔗 Referencias</a:t>
+              <a:t>⚠️ Errores comunes</a:t>
             </a:r>
           </a:p>
         </p:txBody>
@@ -3549,56 +3507,459 @@
                   <a:srgbClr val="22282E"/>
                 </a:solidFill>
               </a:rPr>
-              <a:t>•  Vest &amp; Tubberville — Red Team Development and Operations (OPSEC). &lt;https://redteam.guide/&gt;</a:t>
-            </a:r>
-          </a:p>
-          <a:p>
-            <a:pPr>
-              <a:spcAft>
-                <a:spcPts val="600"/>
-              </a:spcAft>
-            </a:pPr>
-            <a:r>
-              <a:rPr sz="1500">
-                <a:solidFill>
-                  <a:srgbClr val="22282E"/>
-                </a:solidFill>
-              </a:rPr>
-              <a:t>•  MITRE ATT&amp;CK — Defense Evasion (TA0005). &lt;https://attack.mitre.org/tactics/TA0005/&gt;</a:t>
-            </a:r>
-          </a:p>
-          <a:p>
-            <a:pPr>
-              <a:spcAft>
-                <a:spcPts val="600"/>
-              </a:spcAft>
-            </a:pPr>
-            <a:r>
-              <a:rPr sz="1500">
-                <a:solidFill>
-                  <a:srgbClr val="22282E"/>
-                </a:solidFill>
-              </a:rPr>
-              <a:t>•  SpecterOps / research sobre OPSEC de C2.</a:t>
-            </a:r>
-          </a:p>
-          <a:p>
-            <a:pPr>
-              <a:spcAft>
-                <a:spcPts val="600"/>
-              </a:spcAft>
-            </a:pPr>
-            <a:r>
-              <a:rPr sz="1500">
-                <a:solidFill>
-                  <a:srgbClr val="22282E"/>
-                </a:solidFill>
-              </a:rPr>
-              <a:t>•  Bryant, T. — Operator Handbook.</a:t>
-            </a:r>
-          </a:p>
-        </p:txBody>
-      </p:sp>
+              <a:t>•  Detectado por beaconing regular — Jitter=0; añade variación al check-in</a:t>
+            </a:r>
+          </a:p>
+          <a:p>
+            <a:pPr>
+              <a:spcAft>
+                <a:spcPts val="600"/>
+              </a:spcAft>
+            </a:pPr>
+            <a:r>
+              <a:rPr sz="1500">
+                <a:solidFill>
+                  <a:srgbClr val="22282E"/>
+                </a:solidFill>
+              </a:rPr>
+              <a:t>•  El Blue Team te atribuye rápido — Infraestructura reutilizada/identificable; sepárala e higienízala</a:t>
+            </a:r>
+          </a:p>
+          <a:p>
+            <a:pPr>
+              <a:spcAft>
+                <a:spcPts val="600"/>
+              </a:spcAft>
+            </a:pPr>
+            <a:r>
+              <a:rPr sz="1500">
+                <a:solidFill>
+                  <a:srgbClr val="22282E"/>
+                </a:solidFill>
+              </a:rPr>
+              <a:t>•  No puedes hacer deconfliction — Sin cuaderno; registra cada acción con timestamp</a:t>
+            </a:r>
+          </a:p>
+          <a:p>
+            <a:pPr>
+              <a:spcAft>
+                <a:spcPts val="600"/>
+              </a:spcAft>
+            </a:pPr>
+            <a:r>
+              <a:rPr sz="1500">
+                <a:solidFill>
+                  <a:srgbClr val="22282E"/>
+                </a:solidFill>
+              </a:rPr>
+              <a:t>•  Acción innecesariamente ruidosa — No evaluaste alternativas; usa la matriz antes de actuar</a:t>
+            </a:r>
+          </a:p>
+          <a:p>
+            <a:pPr>
+              <a:spcAft>
+                <a:spcPts val="600"/>
+              </a:spcAft>
+            </a:pPr>
+            <a:r>
+              <a:rPr sz="1500">
+                <a:solidFill>
+                  <a:srgbClr val="22282E"/>
+                </a:solidFill>
+              </a:rPr>
+              <a:t>•  Persistes tras ser quemado — No rotaste; ten un plan de reacción listo</a:t>
+            </a:r>
+          </a:p>
+        </p:txBody>
+      </p:sp>
+    </p:spTree>
+  </p:cSld>
+  <p:clrMapOvr>
+    <a:masterClrMapping/>
+  </p:clrMapOvr>
+</p:sld>
+</file>
+
+<file path=ppt/slides/slide13.xml><?xml version="1.0" encoding="utf-8"?>
+<p:sld xmlns:a="http://schemas.openxmlformats.org/drawingml/2006/main" xmlns:p="http://schemas.openxmlformats.org/presentationml/2006/main" xmlns:r="http://schemas.openxmlformats.org/officeDocument/2006/relationships">
+  <p:cSld>
+    <p:spTree>
+      <p:nvGrpSpPr>
+        <p:cNvPr id="1" name=""/>
+        <p:cNvGrpSpPr/>
+        <p:nvPr/>
+      </p:nvGrpSpPr>
+      <p:grpSpPr/>
+      <p:sp>
+        <p:nvSpPr>
+          <p:cNvPr id="2" name="TextBox 1"/>
+          <p:cNvSpPr txBox="1"/>
+          <p:nvPr/>
+        </p:nvSpPr>
+        <p:spPr>
+          <a:xfrm>
+            <a:off x="457200" y="320040"/>
+            <a:ext cx="8229600" cy="822960"/>
+          </a:xfrm>
+          <a:prstGeom prst="rect">
+            <a:avLst/>
+          </a:prstGeom>
+          <a:noFill/>
+        </p:spPr>
+        <p:txBody>
+          <a:bodyPr wrap="square">
+            <a:spAutoFit/>
+          </a:bodyPr>
+          <a:lstStyle/>
+          <a:p>
+            <a:r>
+              <a:rPr sz="2600" b="1">
+                <a:solidFill>
+                  <a:srgbClr val="0B3D2E"/>
+                </a:solidFill>
+              </a:rPr>
+              <a:t>❓ Preguntas frecuentes</a:t>
+            </a:r>
+          </a:p>
+        </p:txBody>
+      </p:sp>
+      <p:sp>
+        <p:nvSpPr>
+          <p:cNvPr id="3" name="TextBox 2"/>
+          <p:cNvSpPr txBox="1"/>
+          <p:nvPr/>
+        </p:nvSpPr>
+        <p:spPr>
+          <a:xfrm>
+            <a:off x="457200" y="1280160"/>
+            <a:ext cx="8229600" cy="4937760"/>
+          </a:xfrm>
+          <a:prstGeom prst="rect">
+            <a:avLst/>
+          </a:prstGeom>
+          <a:noFill/>
+        </p:spPr>
+        <p:txBody>
+          <a:bodyPr wrap="square">
+            <a:spAutoFit/>
+          </a:bodyPr>
+          <a:lstStyle/>
+          <a:p>
+            <a:pPr>
+              <a:spcAft>
+                <a:spcPts val="600"/>
+              </a:spcAft>
+            </a:pPr>
+            <a:r>
+              <a:rPr sz="1500">
+                <a:solidFill>
+                  <a:srgbClr val="22282E"/>
+                </a:solidFill>
+              </a:rPr>
+              <a:t>•  ❓ ¿OPSEC significa no ser detectado nunca?</a:t>
+            </a:r>
+          </a:p>
+          <a:p>
+            <a:pPr>
+              <a:spcAft>
+                <a:spcPts val="600"/>
+              </a:spcAft>
+            </a:pPr>
+            <a:r>
+              <a:rPr sz="1500">
+                <a:solidFill>
+                  <a:srgbClr val="22282E"/>
+                </a:solidFill>
+              </a:rPr>
+              <a:t>•  No. Significa controlar cuándo y cómo generas telemetría, para no quemar la operación antes de tiempo y poder medir la detección de forma útil.</a:t>
+            </a:r>
+          </a:p>
+          <a:p>
+            <a:pPr>
+              <a:spcAft>
+                <a:spcPts val="600"/>
+              </a:spcAft>
+            </a:pPr>
+            <a:r>
+              <a:rPr sz="1500">
+                <a:solidFill>
+                  <a:srgbClr val="22282E"/>
+                </a:solidFill>
+              </a:rPr>
+              <a:t>•  ❓ ¿La técnica más sigilosa es siempre la mejor?</a:t>
+            </a:r>
+          </a:p>
+          <a:p>
+            <a:pPr>
+              <a:spcAft>
+                <a:spcPts val="600"/>
+              </a:spcAft>
+            </a:pPr>
+            <a:r>
+              <a:rPr sz="1500">
+                <a:solidFill>
+                  <a:srgbClr val="22282E"/>
+                </a:solidFill>
+              </a:rPr>
+              <a:t>•  No; la mejor es la menos ruidosa que cumple el objetivo. Sigilo extremo que no logra la meta no sirve.</a:t>
+            </a:r>
+          </a:p>
+          <a:p>
+            <a:pPr>
+              <a:spcAft>
+                <a:spcPts val="600"/>
+              </a:spcAft>
+            </a:pPr>
+            <a:r>
+              <a:rPr sz="1500">
+                <a:solidFill>
+                  <a:srgbClr val="22282E"/>
+                </a:solidFill>
+              </a:rPr>
+              <a:t>•  ❓ ¿Por qué documentar tanto si busco sigilo?</a:t>
+            </a:r>
+          </a:p>
+          <a:p>
+            <a:pPr>
+              <a:spcAft>
+                <a:spcPts val="600"/>
+              </a:spcAft>
+            </a:pPr>
+            <a:r>
+              <a:rPr sz="1500">
+                <a:solidFill>
+                  <a:srgbClr val="22282E"/>
+                </a:solidFill>
+              </a:rPr>
+              <a:t>•  El cuaderno es interno y esencial para deconfliction, reproducibilidad y el informe final. Sigilo ante el objetivo, transparencia total ante el cliente.</a:t>
+            </a:r>
+          </a:p>
+        </p:txBody>
+      </p:sp>
+    </p:spTree>
+  </p:cSld>
+  <p:clrMapOvr>
+    <a:masterClrMapping/>
+  </p:clrMapOvr>
+</p:sld>
+</file>
+
+<file path=ppt/slides/slide14.xml><?xml version="1.0" encoding="utf-8"?>
+<p:sld xmlns:a="http://schemas.openxmlformats.org/drawingml/2006/main" xmlns:p="http://schemas.openxmlformats.org/presentationml/2006/main" xmlns:r="http://schemas.openxmlformats.org/officeDocument/2006/relationships">
+  <p:cSld>
+    <p:spTree>
+      <p:nvGrpSpPr>
+        <p:cNvPr id="1" name=""/>
+        <p:cNvGrpSpPr/>
+        <p:nvPr/>
+      </p:nvGrpSpPr>
+      <p:grpSpPr/>
+      <p:sp>
+        <p:nvSpPr>
+          <p:cNvPr id="2" name="TextBox 1"/>
+          <p:cNvSpPr txBox="1"/>
+          <p:nvPr/>
+        </p:nvSpPr>
+        <p:spPr>
+          <a:xfrm>
+            <a:off x="457200" y="320040"/>
+            <a:ext cx="8229600" cy="822960"/>
+          </a:xfrm>
+          <a:prstGeom prst="rect">
+            <a:avLst/>
+          </a:prstGeom>
+          <a:noFill/>
+        </p:spPr>
+        <p:txBody>
+          <a:bodyPr wrap="square">
+            <a:spAutoFit/>
+          </a:bodyPr>
+          <a:lstStyle/>
+          <a:p>
+            <a:r>
+              <a:rPr sz="2600" b="1">
+                <a:solidFill>
+                  <a:srgbClr val="0B3D2E"/>
+                </a:solidFill>
+              </a:rPr>
+              <a:t>🔗 Referencias</a:t>
+            </a:r>
+          </a:p>
+        </p:txBody>
+      </p:sp>
+      <p:sp>
+        <p:nvSpPr>
+          <p:cNvPr id="3" name="TextBox 2"/>
+          <p:cNvSpPr txBox="1"/>
+          <p:nvPr/>
+        </p:nvSpPr>
+        <p:spPr>
+          <a:xfrm>
+            <a:off x="457200" y="1280160"/>
+            <a:ext cx="8229600" cy="4937760"/>
+          </a:xfrm>
+          <a:prstGeom prst="rect">
+            <a:avLst/>
+          </a:prstGeom>
+          <a:noFill/>
+        </p:spPr>
+        <p:txBody>
+          <a:bodyPr wrap="square">
+            <a:spAutoFit/>
+          </a:bodyPr>
+          <a:lstStyle/>
+          <a:p>
+            <a:pPr>
+              <a:spcAft>
+                <a:spcPts val="600"/>
+              </a:spcAft>
+            </a:pPr>
+            <a:r>
+              <a:rPr sz="1500">
+                <a:solidFill>
+                  <a:srgbClr val="22282E"/>
+                </a:solidFill>
+              </a:rPr>
+              <a:t>•  NIST — Technical Guide to Information Security Testing and Assessment, SP 800-115. &lt;https://doi.org/10.6028/NIST.SP.800-115&gt; — sustenta planificación, consideraciones legales, manejo de datos…</a:t>
+            </a:r>
+          </a:p>
+          <a:p>
+            <a:pPr>
+              <a:spcAft>
+                <a:spcPts val="600"/>
+              </a:spcAft>
+            </a:pPr>
+            <a:r>
+              <a:rPr sz="1500">
+                <a:solidFill>
+                  <a:srgbClr val="22282E"/>
+                </a:solidFill>
+              </a:rPr>
+              <a:t>•  Vest &amp; Tubberville — Red Team Development and Operations. &lt;https://redteam.guide/&gt; — marco específico para planificación, deconfliction y registro de operaciones red team.</a:t>
+            </a:r>
+          </a:p>
+          <a:p>
+            <a:pPr>
+              <a:spcAft>
+                <a:spcPts val="600"/>
+              </a:spcAft>
+            </a:pPr>
+            <a:r>
+              <a:rPr sz="1500">
+                <a:solidFill>
+                  <a:srgbClr val="22282E"/>
+                </a:solidFill>
+              </a:rPr>
+              <a:t>•  MITRE ATT&amp;CK — Defense Evasion (TA0005). &lt;https://attack.mitre.org/tactics/TA0005/&gt; — taxonomía para describir técnicas; no se interpreta como garantía de invisibilidad.</a:t>
+            </a:r>
+          </a:p>
+          <a:p>
+            <a:pPr>
+              <a:spcAft>
+                <a:spcPts val="600"/>
+              </a:spcAft>
+            </a:pPr>
+            <a:r>
+              <a:rPr sz="1500">
+                <a:solidFill>
+                  <a:srgbClr val="22282E"/>
+                </a:solidFill>
+              </a:rPr>
+              <a:t>•  MITRE ATT&amp;CK — Application Layer Protocol (T1071). &lt;https://attack.mitre.org/techniques/T1071/&gt; — referencia para relacionar comunicaciones C2 con fuentes de red y detección.</a:t>
+            </a:r>
+          </a:p>
+          <a:p>
+            <a:pPr>
+              <a:spcAft>
+                <a:spcPts val="600"/>
+              </a:spcAft>
+            </a:pPr>
+            <a:r>
+              <a:rPr sz="1500">
+                <a:solidFill>
+                  <a:srgbClr val="22282E"/>
+                </a:solidFill>
+              </a:rPr>
+              <a:t>•  Bryant, T. — Operator Handbook — consulta operativa complementaria; los límites del ejercicio se fundamentan en NIST SP 800-115.</a:t>
+            </a:r>
+          </a:p>
+        </p:txBody>
+      </p:sp>
+    </p:spTree>
+  </p:cSld>
+  <p:clrMapOvr>
+    <a:masterClrMapping/>
+  </p:clrMapOvr>
+</p:sld>
+</file>
+
+<file path=ppt/slides/slide15.xml><?xml version="1.0" encoding="utf-8"?>
+<p:sld xmlns:a="http://schemas.openxmlformats.org/drawingml/2006/main" xmlns:p="http://schemas.openxmlformats.org/presentationml/2006/main" xmlns:r="http://schemas.openxmlformats.org/officeDocument/2006/relationships">
+  <p:cSld>
+    <p:spTree>
+      <p:nvGrpSpPr>
+        <p:cNvPr id="1" name=""/>
+        <p:cNvGrpSpPr/>
+        <p:nvPr/>
+      </p:nvGrpSpPr>
+      <p:grpSpPr/>
+      <p:sp>
+        <p:nvSpPr>
+          <p:cNvPr id="2" name="TextBox 1"/>
+          <p:cNvSpPr txBox="1"/>
+          <p:nvPr/>
+        </p:nvSpPr>
+        <p:spPr>
+          <a:xfrm>
+            <a:off x="457200" y="274320"/>
+            <a:ext cx="8229600" cy="640080"/>
+          </a:xfrm>
+          <a:prstGeom prst="rect">
+            <a:avLst/>
+          </a:prstGeom>
+          <a:noFill/>
+        </p:spPr>
+        <p:txBody>
+          <a:bodyPr wrap="square">
+            <a:spAutoFit/>
+          </a:bodyPr>
+          <a:lstStyle/>
+          <a:p>
+            <a:r>
+              <a:rPr sz="2200" b="1">
+                <a:solidFill>
+                  <a:srgbClr val="0B3D2E"/>
+                </a:solidFill>
+              </a:rPr>
+              <a:t>Diagrama de la clase</a:t>
+            </a:r>
+          </a:p>
+        </p:txBody>
+      </p:sp>
+      <p:pic>
+        <p:nvPicPr>
+          <p:cNvPr id="3" name="Picture 2" descr="2e49311fdbe8abd9.png"/>
+          <p:cNvPicPr>
+            <a:picLocks noChangeAspect="1"/>
+          </p:cNvPicPr>
+          <p:nvPr/>
+        </p:nvPicPr>
+        <p:blipFill>
+          <a:blip r:embed="rId2"/>
+          <a:stretch>
+            <a:fillRect/>
+          </a:stretch>
+        </p:blipFill>
+        <p:spPr>
+          <a:xfrm>
+            <a:off x="457200" y="3236976"/>
+            <a:ext cx="8229600" cy="1024128"/>
+          </a:xfrm>
+          <a:prstGeom prst="rect">
+            <a:avLst/>
+          </a:prstGeom>
+        </p:spPr>
+      </p:pic>
     </p:spTree>
   </p:cSld>
   <p:clrMapOvr>
@@ -3683,7 +4044,7 @@
                   <a:srgbClr val="22282E"/>
                 </a:solidFill>
               </a:rPr>
-              <a:t>•  Interiorizar la seguridad operacional (OPSEC) del operador: el conjunto de hábitos y decisiones que evitan que la operación sea detectada, atribuida o quemada. El alumno aprenderá a razonar sobre la telemetría que genera cada acción, a elegir la técnica menos ruidosa que cumpla el objetivo y a llevar un registro operativo disciplinado.</a:t>
+              <a:t>•  Interiorizar la seguridad operacional (OPSEC) del operador: el conjunto de hábitos y decisiones que evitan que la operación sea detectada, atribuida o quemada. El alumno aprenderá a razonar sobre la…</a:t>
             </a:r>
           </a:p>
         </p:txBody>
@@ -4077,7 +4438,7 @@
                   <a:srgbClr val="0B3D2E"/>
                 </a:solidFill>
               </a:rPr>
-              <a:t>📖 Definiciones y características</a:t>
+              <a:t>🧠 Explicación en profundidad</a:t>
             </a:r>
           </a:p>
         </p:txBody>
@@ -4115,82 +4476,82 @@
                   <a:srgbClr val="22282E"/>
                 </a:solidFill>
               </a:rPr>
-              <a:t>•  OPSEC: proceso de proteger la operación evitando indicadores detectables o atribuibles. Característica: preventiva, se piensa antes de actuar.</a:t>
-            </a:r>
-          </a:p>
-          <a:p>
-            <a:pPr>
-              <a:spcAft>
-                <a:spcPts val="600"/>
-              </a:spcAft>
-            </a:pPr>
-            <a:r>
-              <a:rPr sz="1500">
-                <a:solidFill>
-                  <a:srgbClr val="22282E"/>
-                </a:solidFill>
-              </a:rPr>
-              <a:t>•  Footprint / huella: telemetría que una acción genera (procesos, red, logs). Característica: se estima por adelantado.</a:t>
-            </a:r>
-          </a:p>
-          <a:p>
-            <a:pPr>
-              <a:spcAft>
-                <a:spcPts val="600"/>
-              </a:spcAft>
-            </a:pPr>
-            <a:r>
-              <a:rPr sz="1500">
-                <a:solidFill>
-                  <a:srgbClr val="22282E"/>
-                </a:solidFill>
-              </a:rPr>
-              <a:t>•  Beaconing: patrón periódico de check-in del C2. Característica: detectable si no hay jitter suficiente.</a:t>
-            </a:r>
-          </a:p>
-          <a:p>
-            <a:pPr>
-              <a:spcAft>
-                <a:spcPts val="600"/>
-              </a:spcAft>
-            </a:pPr>
-            <a:r>
-              <a:rPr sz="1500">
-                <a:solidFill>
-                  <a:srgbClr val="22282E"/>
-                </a:solidFill>
-              </a:rPr>
-              <a:t>•  Atribución: capacidad del defensor de vincular la actividad a un origen. Característica: buena OPSEC la dificulta.</a:t>
-            </a:r>
-          </a:p>
-          <a:p>
-            <a:pPr>
-              <a:spcAft>
-                <a:spcPts val="600"/>
-              </a:spcAft>
-            </a:pPr>
-            <a:r>
-              <a:rPr sz="1500">
-                <a:solidFill>
-                  <a:srgbClr val="22282E"/>
-                </a:solidFill>
-              </a:rPr>
-              <a:t>•  Deconfliction: distinguir la actividad del ejercicio de un incidente real. Característica: requiere logging preciso del operador.</a:t>
-            </a:r>
-          </a:p>
-          <a:p>
-            <a:pPr>
-              <a:spcAft>
-                <a:spcPts val="600"/>
-              </a:spcAft>
-            </a:pPr>
-            <a:r>
-              <a:rPr sz="1500">
-                <a:solidFill>
-                  <a:srgbClr val="22282E"/>
-                </a:solidFill>
-              </a:rPr>
-              <a:t>•  Burned (quemado): cuando una técnica/infra es detectada e inutilizada. Característica: obliga a rotar y adaptarse.</a:t>
+              <a:t>•  OPSEC no es una colección de trucos para «no dejar logs». Es un proceso de decisión: identificar qué información de la operación debe protegerse, observar qué indicadores podrían revelarla, analizar…</a:t>
+            </a:r>
+          </a:p>
+          <a:p>
+            <a:pPr>
+              <a:spcAft>
+                <a:spcPts val="600"/>
+              </a:spcAft>
+            </a:pPr>
+            <a:r>
+              <a:rPr sz="1500">
+                <a:solidFill>
+                  <a:srgbClr val="22282E"/>
+                </a:solidFill>
+              </a:rPr>
+              <a:t>•  La paradoja esencial es que el operador necesita registrar con precisión lo que hace, aunque quiera reducir la huella en el objetivo. El registro se conserva en un canal controlado y con tiempo…</a:t>
+            </a:r>
+          </a:p>
+          <a:p>
+            <a:pPr>
+              <a:spcAft>
+                <a:spcPts val="600"/>
+              </a:spcAft>
+            </a:pPr>
+            <a:r>
+              <a:rPr sz="1500">
+                <a:solidFill>
+                  <a:srgbClr val="22282E"/>
+                </a:solidFill>
+              </a:rPr>
+              <a:t>•  El jitter modifica los intervalos de un beacon para reducir una periodicidad exacta. No oculta el destino, el volumen, el proceso, el patrón de sesión ni las características del protocolo. Un…</a:t>
+            </a:r>
+          </a:p>
+          <a:p>
+            <a:pPr>
+              <a:spcAft>
+                <a:spcPts val="600"/>
+              </a:spcAft>
+            </a:pPr>
+            <a:r>
+              <a:rPr sz="1500">
+                <a:solidFill>
+                  <a:srgbClr val="22282E"/>
+                </a:solidFill>
+              </a:rPr>
+              <a:t>•  Cada acción se expresa como una pareja efecto necesario / observaciones previsibles. Si el objetivo es demostrar acceso a un archivo, quizá baste con leer un marcador inocuo; copiar un directorio…</a:t>
+            </a:r>
+          </a:p>
+          <a:p>
+            <a:pPr>
+              <a:spcAft>
+                <a:spcPts val="600"/>
+              </a:spcAft>
+            </a:pPr>
+            <a:r>
+              <a:rPr sz="1500">
+                <a:solidFill>
+                  <a:srgbClr val="22282E"/>
+                </a:solidFill>
+              </a:rPr>
+              <a:t>•  Antes del ejercicio se acuerdan identificadores, contactos, canal de emergencia, ventanas y condiciones de parada. Cuando aparece una alerta inesperada, el operador no borra rastros ni improvisa.…</a:t>
+            </a:r>
+          </a:p>
+          <a:p>
+            <a:pPr>
+              <a:spcAft>
+                <a:spcPts val="600"/>
+              </a:spcAft>
+            </a:pPr>
+            <a:r>
+              <a:rPr sz="1500">
+                <a:solidFill>
+                  <a:srgbClr val="22282E"/>
+                </a:solidFill>
+              </a:rPr>
+              <a:t>•  Si una técnica queda expuesta, la lección incluye por qué: proceso, red, identidad, contenido o secuencia. El informe no evalúa al operador por permanecer invisible a toda costa, sino por probar el…</a:t>
             </a:r>
           </a:p>
         </p:txBody>
@@ -4241,7 +4602,7 @@
                   <a:srgbClr val="0B3D2E"/>
                 </a:solidFill>
               </a:rPr>
-              <a:t>🧰 Herramientas y preparación</a:t>
+              <a:t>📖 Definiciones y características</a:t>
             </a:r>
           </a:p>
         </p:txBody>
@@ -4279,52 +4640,82 @@
                   <a:srgbClr val="22282E"/>
                 </a:solidFill>
               </a:rPr>
-              <a:t>•  El cuaderno de operación (repo/Obsidian) para registrar cada acción con hora, host, comando y resultado.</a:t>
-            </a:r>
-          </a:p>
-          <a:p>
-            <a:pPr>
-              <a:spcAft>
-                <a:spcPts val="600"/>
-              </a:spcAft>
-            </a:pPr>
-            <a:r>
-              <a:rPr sz="1500">
-                <a:solidFill>
-                  <a:srgbClr val="22282E"/>
-                </a:solidFill>
-              </a:rPr>
-              <a:t>•  La infraestructura C2 con redirectores y perfiles (Clases 164–165).</a:t>
-            </a:r>
-          </a:p>
-          <a:p>
-            <a:pPr>
-              <a:spcAft>
-                <a:spcPts val="600"/>
-              </a:spcAft>
-            </a:pPr>
-            <a:r>
-              <a:rPr sz="1500">
-                <a:solidFill>
-                  <a:srgbClr val="22282E"/>
-                </a:solidFill>
-              </a:rPr>
-              <a:t>•  Conocimiento de la telemetría defensiva (Sysmon, ETW, EDR) para anticiparla.</a:t>
-            </a:r>
-          </a:p>
-          <a:p>
-            <a:pPr>
-              <a:spcAft>
-                <a:spcPts val="600"/>
-              </a:spcAft>
-            </a:pPr>
-            <a:r>
-              <a:rPr sz="1500">
-                <a:solidFill>
-                  <a:srgbClr val="22282E"/>
-                </a:solidFill>
-              </a:rPr>
-              <a:t>•  Una matriz de "acción → telemetría → alternativa" como ayuda de decisión.</a:t>
+              <a:t>•  OPSEC: proceso de proteger la operación evitando indicadores detectables o atribuibles. Característica: preventiva, se piensa antes de actuar.</a:t>
+            </a:r>
+          </a:p>
+          <a:p>
+            <a:pPr>
+              <a:spcAft>
+                <a:spcPts val="600"/>
+              </a:spcAft>
+            </a:pPr>
+            <a:r>
+              <a:rPr sz="1500">
+                <a:solidFill>
+                  <a:srgbClr val="22282E"/>
+                </a:solidFill>
+              </a:rPr>
+              <a:t>•  Footprint / huella: telemetría que una acción genera (procesos, red, logs). Característica: se estima por adelantado.</a:t>
+            </a:r>
+          </a:p>
+          <a:p>
+            <a:pPr>
+              <a:spcAft>
+                <a:spcPts val="600"/>
+              </a:spcAft>
+            </a:pPr>
+            <a:r>
+              <a:rPr sz="1500">
+                <a:solidFill>
+                  <a:srgbClr val="22282E"/>
+                </a:solidFill>
+              </a:rPr>
+              <a:t>•  Beaconing: patrón periódico de check-in del C2. Característica: detectable si no hay jitter suficiente.</a:t>
+            </a:r>
+          </a:p>
+          <a:p>
+            <a:pPr>
+              <a:spcAft>
+                <a:spcPts val="600"/>
+              </a:spcAft>
+            </a:pPr>
+            <a:r>
+              <a:rPr sz="1500">
+                <a:solidFill>
+                  <a:srgbClr val="22282E"/>
+                </a:solidFill>
+              </a:rPr>
+              <a:t>•  Atribución: capacidad del defensor de vincular la actividad a un origen. Característica: buena OPSEC la dificulta.</a:t>
+            </a:r>
+          </a:p>
+          <a:p>
+            <a:pPr>
+              <a:spcAft>
+                <a:spcPts val="600"/>
+              </a:spcAft>
+            </a:pPr>
+            <a:r>
+              <a:rPr sz="1500">
+                <a:solidFill>
+                  <a:srgbClr val="22282E"/>
+                </a:solidFill>
+              </a:rPr>
+              <a:t>•  Deconfliction: distinguir la actividad del ejercicio de un incidente real. Característica: requiere logging preciso del operador.</a:t>
+            </a:r>
+          </a:p>
+          <a:p>
+            <a:pPr>
+              <a:spcAft>
+                <a:spcPts val="600"/>
+              </a:spcAft>
+            </a:pPr>
+            <a:r>
+              <a:rPr sz="1500">
+                <a:solidFill>
+                  <a:srgbClr val="22282E"/>
+                </a:solidFill>
+              </a:rPr>
+              <a:t>•  Burned (quemado): cuando una técnica/infra es detectada e inutilizada. Característica: obliga a rotar y adaptarse.</a:t>
             </a:r>
           </a:p>
         </p:txBody>
@@ -4375,7 +4766,7 @@
                   <a:srgbClr val="0B3D2E"/>
                 </a:solidFill>
               </a:rPr>
-              <a:t>🧪 Laboratorio guiado (ejercicio aplicado)</a:t>
+              <a:t>📔 Glosario</a:t>
             </a:r>
           </a:p>
         </p:txBody>
@@ -4413,97 +4804,97 @@
                   <a:srgbClr val="22282E"/>
                 </a:solidFill>
               </a:rPr>
-              <a:t>•  Construye una matriz OPSEC. Para 6 acciones (dump de LSASS, DCSync, escaneo, Kerberoasting, lateral por SMB, ejecución de PowerShell), anota la telemetría esperada y una alternativa más sigilosa.</a:t>
-            </a:r>
-          </a:p>
-          <a:p>
-            <a:pPr>
-              <a:spcAft>
-                <a:spcPts val="600"/>
-              </a:spcAft>
-            </a:pPr>
-            <a:r>
-              <a:rPr sz="1500">
-                <a:solidFill>
-                  <a:srgbClr val="22282E"/>
-                </a:solidFill>
-              </a:rPr>
-              <a:t>•  Analiza tu C2. Revisa el sleep/jitter de tu implante y ajústalo para romper el beaconing; justifica el nuevo valor.</a:t>
-            </a:r>
-          </a:p>
-          <a:p>
-            <a:pPr>
-              <a:spcAft>
-                <a:spcPts val="600"/>
-              </a:spcAft>
-            </a:pPr>
-            <a:r>
-              <a:rPr sz="1500">
-                <a:solidFill>
-                  <a:srgbClr val="22282E"/>
-                </a:solidFill>
-              </a:rPr>
-              <a:t>•  Higiene de infraestructura. Verifica que team server, redirectores y dominios están separados por función y sin datos que te atribuyan.</a:t>
-            </a:r>
-          </a:p>
-          <a:p>
-            <a:pPr>
-              <a:spcAft>
-                <a:spcPts val="600"/>
-              </a:spcAft>
-            </a:pPr>
-            <a:r>
-              <a:rPr sz="1500">
-                <a:solidFill>
-                  <a:srgbClr val="22282E"/>
-                </a:solidFill>
-              </a:rPr>
-              <a:t>•  Simula una acción ruidosa. Ejecuta en el lab un dump de LSASS con Sysmon activo y observa el evento generado (EID 10); luego plantea cómo reducir esa huella.</a:t>
-            </a:r>
-          </a:p>
-          <a:p>
-            <a:pPr>
-              <a:spcAft>
-                <a:spcPts val="600"/>
-              </a:spcAft>
-            </a:pPr>
-            <a:r>
-              <a:rPr sz="1500">
-                <a:solidFill>
-                  <a:srgbClr val="22282E"/>
-                </a:solidFill>
-              </a:rPr>
-              <a:t>•  Registro disciplinado. Documenta cada paso anterior en el cuaderno con timestamp, host y hash del artefacto, listo para deconfliction.</a:t>
-            </a:r>
-          </a:p>
-          <a:p>
-            <a:pPr>
-              <a:spcAft>
-                <a:spcPts val="600"/>
-              </a:spcAft>
-            </a:pPr>
-            <a:r>
-              <a:rPr sz="1500">
-                <a:solidFill>
-                  <a:srgbClr val="22282E"/>
-                </a:solidFill>
-              </a:rPr>
-              <a:t>•  Plan de reacción. Escribe qué harías si detectas que el Blue Team te descubrió (rotar infra, bajar el ritmo, cambiar de canal).</a:t>
-            </a:r>
-          </a:p>
-          <a:p>
-            <a:pPr>
-              <a:spcAft>
-                <a:spcPts val="600"/>
-              </a:spcAft>
-            </a:pPr>
-            <a:r>
-              <a:rPr sz="1500">
-                <a:solidFill>
-                  <a:srgbClr val="22282E"/>
-                </a:solidFill>
-              </a:rPr>
-              <a:t>•  Revisión. Contrasta tu matriz con lo observado en Sysmon y ajusta las alternativas.</a:t>
+              <a:t>•  OPSEC: proceso para identificar y proteger información crítica frente a observación adversaria.</a:t>
+            </a:r>
+          </a:p>
+          <a:p>
+            <a:pPr>
+              <a:spcAft>
+                <a:spcPts val="600"/>
+              </a:spcAft>
+            </a:pPr>
+            <a:r>
+              <a:rPr sz="1500">
+                <a:solidFill>
+                  <a:srgbClr val="22282E"/>
+                </a:solidFill>
+              </a:rPr>
+              <a:t>•  Información crítica: dato cuya exposición perjudica la seguridad o validez del ejercicio.</a:t>
+            </a:r>
+          </a:p>
+          <a:p>
+            <a:pPr>
+              <a:spcAft>
+                <a:spcPts val="600"/>
+              </a:spcAft>
+            </a:pPr>
+            <a:r>
+              <a:rPr sz="1500">
+                <a:solidFill>
+                  <a:srgbClr val="22282E"/>
+                </a:solidFill>
+              </a:rPr>
+              <a:t>•  Indicador observable: señal que permite inferir una actividad o intención.</a:t>
+            </a:r>
+          </a:p>
+          <a:p>
+            <a:pPr>
+              <a:spcAft>
+                <a:spcPts val="600"/>
+              </a:spcAft>
+            </a:pPr>
+            <a:r>
+              <a:rPr sz="1500">
+                <a:solidFill>
+                  <a:srgbClr val="22282E"/>
+                </a:solidFill>
+              </a:rPr>
+              <a:t>•  Huella: conjunto de artefactos y telemetría generado por una acción.</a:t>
+            </a:r>
+          </a:p>
+          <a:p>
+            <a:pPr>
+              <a:spcAft>
+                <a:spcPts val="600"/>
+              </a:spcAft>
+            </a:pPr>
+            <a:r>
+              <a:rPr sz="1500">
+                <a:solidFill>
+                  <a:srgbClr val="22282E"/>
+                </a:solidFill>
+              </a:rPr>
+              <a:t>•  Beacon: comunicación periódica o semiperiódica de un agente con su infraestructura.</a:t>
+            </a:r>
+          </a:p>
+          <a:p>
+            <a:pPr>
+              <a:spcAft>
+                <a:spcPts val="600"/>
+              </a:spcAft>
+            </a:pPr>
+            <a:r>
+              <a:rPr sz="1500">
+                <a:solidFill>
+                  <a:srgbClr val="22282E"/>
+                </a:solidFill>
+              </a:rPr>
+              <a:t>•  Jitter: variación aplicada al intervalo de comunicación; no garantiza ocultación.</a:t>
+            </a:r>
+          </a:p>
+          <a:p>
+            <a:pPr>
+              <a:spcAft>
+                <a:spcPts val="600"/>
+              </a:spcAft>
+            </a:pPr>
+            <a:r>
+              <a:rPr sz="1500">
+                <a:solidFill>
+                  <a:srgbClr val="22282E"/>
+                </a:solidFill>
+              </a:rPr>
+              <a:t>•  Deconfliction: mecanismo para separar actividad del ejercicio de incidentes reales.</a:t>
             </a:r>
           </a:p>
         </p:txBody>
@@ -4554,7 +4945,7 @@
                   <a:srgbClr val="0B3D2E"/>
                 </a:solidFill>
               </a:rPr>
-              <a:t>✍️ Ejercicios</a:t>
+              <a:t>🧰 Herramientas y preparación</a:t>
             </a:r>
           </a:p>
         </p:txBody>
@@ -4592,82 +4983,52 @@
                   <a:srgbClr val="22282E"/>
                 </a:solidFill>
               </a:rPr>
-              <a:t>•  Define OPSEC con tus palabras y da un ejemplo de mala OPSEC.</a:t>
-            </a:r>
-          </a:p>
-          <a:p>
-            <a:pPr>
-              <a:spcAft>
-                <a:spcPts val="600"/>
-              </a:spcAft>
-            </a:pPr>
-            <a:r>
-              <a:rPr sz="1500">
-                <a:solidFill>
-                  <a:srgbClr val="22282E"/>
-                </a:solidFill>
-              </a:rPr>
-              <a:t>•  Completa una matriz "acción → telemetría → alternativa" con 8 filas.</a:t>
-            </a:r>
-          </a:p>
-          <a:p>
-            <a:pPr>
-              <a:spcAft>
-                <a:spcPts val="600"/>
-              </a:spcAft>
-            </a:pPr>
-            <a:r>
-              <a:rPr sz="1500">
-                <a:solidFill>
-                  <a:srgbClr val="22282E"/>
-                </a:solidFill>
-              </a:rPr>
-              <a:t>•  Explica cómo el jitter dificulta la detección de beaconing.</a:t>
-            </a:r>
-          </a:p>
-          <a:p>
-            <a:pPr>
-              <a:spcAft>
-                <a:spcPts val="600"/>
-              </a:spcAft>
-            </a:pPr>
-            <a:r>
-              <a:rPr sz="1500">
-                <a:solidFill>
-                  <a:srgbClr val="22282E"/>
-                </a:solidFill>
-              </a:rPr>
-              <a:t>•  Diseña un esquema de infraestructura que minimice la atribución.</a:t>
-            </a:r>
-          </a:p>
-          <a:p>
-            <a:pPr>
-              <a:spcAft>
-                <a:spcPts val="600"/>
-              </a:spcAft>
-            </a:pPr>
-            <a:r>
-              <a:rPr sz="1500">
-                <a:solidFill>
-                  <a:srgbClr val="22282E"/>
-                </a:solidFill>
-              </a:rPr>
-              <a:t>•  Redacta el formato de una entrada de cuaderno de operación.</a:t>
-            </a:r>
-          </a:p>
-          <a:p>
-            <a:pPr>
-              <a:spcAft>
-                <a:spcPts val="600"/>
-              </a:spcAft>
-            </a:pPr>
-            <a:r>
-              <a:rPr sz="1500">
-                <a:solidFill>
-                  <a:srgbClr val="22282E"/>
-                </a:solidFill>
-              </a:rPr>
-              <a:t>•  Escribe un plan de 5 pasos para cuando te "queman".</a:t>
+              <a:t>•  El cuaderno de operación (repo/Obsidian) para registrar cada acción con hora, host, comando y resultado.</a:t>
+            </a:r>
+          </a:p>
+          <a:p>
+            <a:pPr>
+              <a:spcAft>
+                <a:spcPts val="600"/>
+              </a:spcAft>
+            </a:pPr>
+            <a:r>
+              <a:rPr sz="1500">
+                <a:solidFill>
+                  <a:srgbClr val="22282E"/>
+                </a:solidFill>
+              </a:rPr>
+              <a:t>•  La infraestructura C2 con redirectores y perfiles (Clases 164–165).</a:t>
+            </a:r>
+          </a:p>
+          <a:p>
+            <a:pPr>
+              <a:spcAft>
+                <a:spcPts val="600"/>
+              </a:spcAft>
+            </a:pPr>
+            <a:r>
+              <a:rPr sz="1500">
+                <a:solidFill>
+                  <a:srgbClr val="22282E"/>
+                </a:solidFill>
+              </a:rPr>
+              <a:t>•  Conocimiento de la telemetría defensiva (Sysmon, ETW, EDR) para anticiparla.</a:t>
+            </a:r>
+          </a:p>
+          <a:p>
+            <a:pPr>
+              <a:spcAft>
+                <a:spcPts val="600"/>
+              </a:spcAft>
+            </a:pPr>
+            <a:r>
+              <a:rPr sz="1500">
+                <a:solidFill>
+                  <a:srgbClr val="22282E"/>
+                </a:solidFill>
+              </a:rPr>
+              <a:t>•  Una matriz de "acción → telemetría → alternativa" como ayuda de decisión.</a:t>
             </a:r>
           </a:p>
         </p:txBody>
@@ -4718,7 +5079,7 @@
                   <a:srgbClr val="0B3D2E"/>
                 </a:solidFill>
               </a:rPr>
-              <a:t>📝 Reto verificable</a:t>
+              <a:t>🧪 Laboratorio guiado (ejercicio aplicado)</a:t>
             </a:r>
           </a:p>
         </p:txBody>
@@ -4756,22 +5117,97 @@
                   <a:srgbClr val="22282E"/>
                 </a:solidFill>
               </a:rPr>
-              <a:t>•  Entrega una matriz OPSEC de al menos 8 acciones ofensivas con su telemetría y alternativa más sigilosa, respaldada por al menos una observación real en Sysmon de tu lab.</a:t>
-            </a:r>
-          </a:p>
-          <a:p>
-            <a:pPr>
-              <a:spcAft>
-                <a:spcPts val="600"/>
-              </a:spcAft>
-            </a:pPr>
-            <a:r>
-              <a:rPr sz="1500">
-                <a:solidFill>
-                  <a:srgbClr val="22282E"/>
-                </a:solidFill>
-              </a:rPr>
-              <a:t>•  Criterio de aceptación: cada fila tiene acción, telemetría concreta (evento/fuente de datos) y una alternativa justificada; al menos una fila se apoya en un evento que capturaste tú mismo en el laboratorio.</a:t>
+              <a:t>•  Construye una matriz OPSEC. Para 6 acciones (dump de LSASS, DCSync, escaneo, Kerberoasting, lateral por SMB, ejecución de PowerShell), anota la telemetría esperada y una alternativa más sigilosa.</a:t>
+            </a:r>
+          </a:p>
+          <a:p>
+            <a:pPr>
+              <a:spcAft>
+                <a:spcPts val="600"/>
+              </a:spcAft>
+            </a:pPr>
+            <a:r>
+              <a:rPr sz="1500">
+                <a:solidFill>
+                  <a:srgbClr val="22282E"/>
+                </a:solidFill>
+              </a:rPr>
+              <a:t>•  Analiza tu C2. Revisa el sleep/jitter de tu implante y ajústalo para romper el beaconing; justifica el nuevo valor.</a:t>
+            </a:r>
+          </a:p>
+          <a:p>
+            <a:pPr>
+              <a:spcAft>
+                <a:spcPts val="600"/>
+              </a:spcAft>
+            </a:pPr>
+            <a:r>
+              <a:rPr sz="1500">
+                <a:solidFill>
+                  <a:srgbClr val="22282E"/>
+                </a:solidFill>
+              </a:rPr>
+              <a:t>•  Higiene de infraestructura. Verifica que team server, redirectores y dominios están separados por función y sin datos que te atribuyan.</a:t>
+            </a:r>
+          </a:p>
+          <a:p>
+            <a:pPr>
+              <a:spcAft>
+                <a:spcPts val="600"/>
+              </a:spcAft>
+            </a:pPr>
+            <a:r>
+              <a:rPr sz="1500">
+                <a:solidFill>
+                  <a:srgbClr val="22282E"/>
+                </a:solidFill>
+              </a:rPr>
+              <a:t>•  Simula una acción ruidosa. Ejecuta en el lab un dump de LSASS con Sysmon activo y observa el evento generado (EID 10); luego plantea cómo reducir esa huella.</a:t>
+            </a:r>
+          </a:p>
+          <a:p>
+            <a:pPr>
+              <a:spcAft>
+                <a:spcPts val="600"/>
+              </a:spcAft>
+            </a:pPr>
+            <a:r>
+              <a:rPr sz="1500">
+                <a:solidFill>
+                  <a:srgbClr val="22282E"/>
+                </a:solidFill>
+              </a:rPr>
+              <a:t>•  Registro disciplinado. Documenta cada paso anterior en el cuaderno con timestamp, host y hash del artefacto, listo para deconfliction.</a:t>
+            </a:r>
+          </a:p>
+          <a:p>
+            <a:pPr>
+              <a:spcAft>
+                <a:spcPts val="600"/>
+              </a:spcAft>
+            </a:pPr>
+            <a:r>
+              <a:rPr sz="1500">
+                <a:solidFill>
+                  <a:srgbClr val="22282E"/>
+                </a:solidFill>
+              </a:rPr>
+              <a:t>•  Plan de reacción. Escribe qué harías si detectas que el Blue Team te descubrió (rotar infra, bajar el ritmo, cambiar de canal).</a:t>
+            </a:r>
+          </a:p>
+          <a:p>
+            <a:pPr>
+              <a:spcAft>
+                <a:spcPts val="600"/>
+              </a:spcAft>
+            </a:pPr>
+            <a:r>
+              <a:rPr sz="1500">
+                <a:solidFill>
+                  <a:srgbClr val="22282E"/>
+                </a:solidFill>
+              </a:rPr>
+              <a:t>•  Revisión. Contrasta tu matriz con lo observado en Sysmon y ajusta las alternativas.</a:t>
             </a:r>
           </a:p>
         </p:txBody>
